--- a/startup-roof/deliverables/Startup_Roof_General_Presentation.pptx
+++ b/startup-roof/deliverables/Startup_Roof_General_Presentation.pptx
@@ -20011,16 +20011,7 @@
                 </a:solidFill>
                 <a:latin typeface="Inter"/>
               </a:rPr>
-              <a:t>20</a:t>
-            </a:r>
-            <a:r>
-              <a:rPr sz="1000" b="1" i="0" spc="150">
-                <a:solidFill>
-                  <a:srgbClr val="4F8BE0"/>
-                </a:solidFill>
-                <a:latin typeface="Inter"/>
-              </a:rPr>
-              <a:t>   INVITATION TO PARTICIPATE</a:t>
+              <a:t>20   INVITATION TO PARTICIPATE</a:t>
             </a:r>
           </a:p>
         </p:txBody>
